--- a/BACKUP&RECOVERY/01장/01장_백업복구_개요와_19c_복구_아키텍처.pptx
+++ b/BACKUP&RECOVERY/01장/01장_백업복구_개요와_19c_복구_아키텍처.pptx
@@ -10021,7 +10021,7 @@
                 <a:latin typeface="Consolas"/>
                 <a:ea typeface="Consolas"/>
               </a:rPr>
-              <a:t>/u01/app/oracle/oradata/ORCL/control01.ctl</a:t>
+              <a:t>/u01/app/oracle/oradata/orcl/control01.ctl</a:t>
             </a:r>
           </a:p>
           <a:p>
@@ -10038,7 +10038,7 @@
                 <a:latin typeface="Consolas"/>
                 <a:ea typeface="Consolas"/>
               </a:rPr>
-              <a:t>/u01/app/oracle/oradata/ORCL/control02.ctl</a:t>
+              <a:t>/u01/app/oracle/oradata/orcl/control02.ctl</a:t>
             </a:r>
           </a:p>
           <a:p>
@@ -11632,7 +11632,7 @@
                 <a:latin typeface="Consolas"/>
                 <a:ea typeface="Consolas"/>
               </a:rPr>
-              <a:t>         1 /u01/app/oracle/oradata/ORCL/redo01.log</a:t>
+              <a:t>         1 /u01/app/oracle/oradata/orcl/redo01.log</a:t>
             </a:r>
           </a:p>
           <a:p>
@@ -11649,7 +11649,7 @@
                 <a:latin typeface="Consolas"/>
                 <a:ea typeface="Consolas"/>
               </a:rPr>
-              <a:t>         2 /u01/app/oracle/oradata/ORCL/redo02.log</a:t>
+              <a:t>         2 /u01/app/oracle/oradata/orcl/redo02.log</a:t>
             </a:r>
           </a:p>
           <a:p>
@@ -11666,7 +11666,7 @@
                 <a:latin typeface="Consolas"/>
                 <a:ea typeface="Consolas"/>
               </a:rPr>
-              <a:t>         3 /u01/app/oracle/oradata/ORCL/redo03.log</a:t>
+              <a:t>         3 /u01/app/oracle/oradata/orcl/redo03.log</a:t>
             </a:r>
           </a:p>
         </p:txBody>
@@ -13080,7 +13080,7 @@
                 <a:latin typeface="Consolas"/>
                 <a:ea typeface="Consolas"/>
               </a:rPr>
-              <a:t>/u01/app/oracle/oradata/ORCL/system01.dbf</a:t>
+              <a:t>/u01/app/oracle/oradata/orcl/system01.dbf</a:t>
             </a:r>
           </a:p>
           <a:p>
@@ -13097,7 +13097,7 @@
                 <a:latin typeface="Consolas"/>
                 <a:ea typeface="Consolas"/>
               </a:rPr>
-              <a:t>/u01/app/oracle/oradata/ORCL/sysaux01.dbf</a:t>
+              <a:t>/u01/app/oracle/oradata/orcl/sysaux01.dbf</a:t>
             </a:r>
           </a:p>
           <a:p>
@@ -13114,7 +13114,7 @@
                 <a:latin typeface="Consolas"/>
                 <a:ea typeface="Consolas"/>
               </a:rPr>
-              <a:t>/u01/app/oracle/oradata/ORCL/undotbs01.dbf</a:t>
+              <a:t>/u01/app/oracle/oradata/orcl/undotbs01.dbf</a:t>
             </a:r>
           </a:p>
           <a:p>
@@ -13131,7 +13131,7 @@
                 <a:latin typeface="Consolas"/>
                 <a:ea typeface="Consolas"/>
               </a:rPr>
-              <a:t>/u01/app/oracle/oradata/ORCL/users01.dbf</a:t>
+              <a:t>/u01/app/oracle/oradata/orcl/users01.dbf</a:t>
             </a:r>
           </a:p>
           <a:p>
@@ -13148,7 +13148,7 @@
                 <a:latin typeface="Consolas"/>
                 <a:ea typeface="Consolas"/>
               </a:rPr>
-              <a:t>/u01/app/oracle/oradata/ORCL/control01.ctl</a:t>
+              <a:t>/u01/app/oracle/oradata/orcl/control01.ctl</a:t>
             </a:r>
           </a:p>
           <a:p>
@@ -13165,7 +13165,7 @@
                 <a:latin typeface="Consolas"/>
                 <a:ea typeface="Consolas"/>
               </a:rPr>
-              <a:t>/u01/app/oracle/oradata/ORCL/control02.ctl</a:t>
+              <a:t>/u01/app/oracle/oradata/orcl/control02.ctl</a:t>
             </a:r>
           </a:p>
           <a:p>
@@ -13182,7 +13182,7 @@
                 <a:latin typeface="Consolas"/>
                 <a:ea typeface="Consolas"/>
               </a:rPr>
-              <a:t>/u01/app/oracle/oradata/ORCL/redo01.log</a:t>
+              <a:t>/u01/app/oracle/oradata/orcl/redo01.log</a:t>
             </a:r>
           </a:p>
           <a:p>
@@ -13199,7 +13199,7 @@
                 <a:latin typeface="Consolas"/>
                 <a:ea typeface="Consolas"/>
               </a:rPr>
-              <a:t>/u01/app/oracle/oradata/ORCL/redo02.log</a:t>
+              <a:t>/u01/app/oracle/oradata/orcl/redo02.log</a:t>
             </a:r>
           </a:p>
           <a:p>
@@ -13216,7 +13216,7 @@
                 <a:latin typeface="Consolas"/>
                 <a:ea typeface="Consolas"/>
               </a:rPr>
-              <a:t>/u01/app/oracle/oradata/ORCL/redo03.log</a:t>
+              <a:t>/u01/app/oracle/oradata/orcl/redo03.log</a:t>
             </a:r>
           </a:p>
           <a:p>
@@ -14164,7 +14164,7 @@
                 <a:latin typeface="Consolas"/>
                 <a:ea typeface="Consolas"/>
               </a:rPr>
-              <a:t>         1 /u01/app/oracle/oradata/ORCL/system01.dbf                2097189 SYSTEM</a:t>
+              <a:t>         1 /u01/app/oracle/oradata/orcl/system01.dbf                2097189 SYSTEM</a:t>
             </a:r>
           </a:p>
           <a:p>
@@ -14181,7 +14181,7 @@
                 <a:latin typeface="Consolas"/>
                 <a:ea typeface="Consolas"/>
               </a:rPr>
-              <a:t>         3 /u01/app/oracle/oradata/ORCL/sysaux01.dbf                2097189 ONLINE</a:t>
+              <a:t>         3 /u01/app/oracle/oradata/orcl/sysaux01.dbf                2097189 ONLINE</a:t>
             </a:r>
           </a:p>
           <a:p>
@@ -14198,7 +14198,7 @@
                 <a:latin typeface="Consolas"/>
                 <a:ea typeface="Consolas"/>
               </a:rPr>
-              <a:t>         4 /u01/app/oracle/oradata/ORCL/undotbs01.dbf               2097189 ONLINE</a:t>
+              <a:t>         4 /u01/app/oracle/oradata/orcl/undotbs01.dbf               2097189 ONLINE</a:t>
             </a:r>
           </a:p>
           <a:p>
@@ -14215,7 +14215,7 @@
                 <a:latin typeface="Consolas"/>
                 <a:ea typeface="Consolas"/>
               </a:rPr>
-              <a:t>         7 /u01/app/oracle/oradata/ORCL/users01.dbf                 2097189 ONLINE</a:t>
+              <a:t>         7 /u01/app/oracle/oradata/orcl/users01.dbf                 2097189 ONLINE</a:t>
             </a:r>
           </a:p>
           <a:p>
@@ -21525,7 +21525,7 @@
                 <a:latin typeface="Consolas"/>
                 <a:ea typeface="Consolas"/>
               </a:rPr>
-              <a:t>ORA-01110: data file 7: '/u01/app/oracle/oradata/ORCL/users01.dbf'</a:t>
+              <a:t>ORA-01110: data file 7: '/u01/app/oracle/oradata/orcl/users01.dbf'</a:t>
             </a:r>
           </a:p>
           <a:p>
